--- a/assets/slides/CSCI_591_Malicious_Code_Analysis_2.pptx
+++ b/assets/slides/CSCI_591_Malicious_Code_Analysis_2.pptx
@@ -47,51 +47,32 @@
   <p:notesSz cx="6858000" cy="9144000"/>
   <p:embeddedFontLst>
     <p:embeddedFont>
-      <p:font typeface="SimSun" panose="02010600030101010101" pitchFamily="2" charset="-122"/>
+      <p:font typeface="Palatino Linotype" panose="02040502050505030304" charset="0"/>
       <p:regular r:id="rId42"/>
     </p:embeddedFont>
     <p:embeddedFont>
-      <p:font typeface="Arial Black" panose="020B0A04020102020204" charset="0"/>
-      <p:bold r:id="rId43"/>
-    </p:embeddedFont>
-    <p:embeddedFont>
-      <p:font typeface="Palatino Linotype" panose="02040502050505030304" charset="0"/>
-      <p:regular r:id="rId44"/>
-      <p:bold r:id="rId45"/>
-      <p:italic r:id="rId46"/>
-      <p:boldItalic r:id="rId47"/>
-    </p:embeddedFont>
-    <p:embeddedFont>
       <p:font typeface="STKaiti" panose="02010600040101010101" pitchFamily="2" charset="-122"/>
-      <p:bold r:id="rId48"/>
-      <p:boldItalic r:id="rId49"/>
+      <p:regular r:id="rId43"/>
     </p:embeddedFont>
     <p:embeddedFont>
       <p:font typeface="Microsoft YaHei" panose="020B0503020204020204" charset="-122"/>
-      <p:regular r:id="rId50"/>
+      <p:regular r:id="rId44"/>
     </p:embeddedFont>
     <p:embeddedFont>
       <p:font typeface="Segoe UI" panose="020B0502040204020203"/>
-      <p:regular r:id="rId51"/>
-      <p:bold r:id="rId52"/>
-      <p:italic r:id="rId53"/>
-      <p:boldItalic r:id="rId54"/>
+      <p:regular r:id="rId45"/>
     </p:embeddedFont>
     <p:embeddedFont>
-      <p:font typeface="Microsoft YaHei Light" panose="020B0502040204020203" charset="-122"/>
-      <p:regular r:id="rId55"/>
+      <p:font typeface="Microsoft YaHei Light" charset="-122"/>
+      <p:regular r:id="rId46"/>
     </p:embeddedFont>
     <p:embeddedFont>
       <p:font typeface="Calibri" panose="020F0502020204030204" charset="0"/>
-      <p:regular r:id="rId56"/>
-      <p:bold r:id="rId57"/>
-      <p:italic r:id="rId58"/>
-      <p:boldItalic r:id="rId59"/>
+      <p:regular r:id="rId47"/>
     </p:embeddedFont>
     <p:embeddedFont>
-      <p:font typeface="Calibri Light" panose="020F0302020204030204" charset="0"/>
-      <p:regular r:id="rId60"/>
-      <p:italic r:id="rId61"/>
+      <p:font typeface="Calibri Light" charset="0"/>
+      <p:regular r:id="rId48"/>
     </p:embeddedFont>
   </p:embeddedFontLst>
   <p:defaultTextStyle>
@@ -14217,18 +14198,30 @@
                   <a:prstClr val="black"/>
                 </a:solidFill>
                 <a:latin typeface="Arial" panose="020B0604020202020204" pitchFamily="34" charset="0"/>
-                <a:ea typeface="Microsoft YaHei Light" panose="020B0502040204020203" charset="-122"/>
+                <a:ea typeface="Microsoft YaHei Light" charset="-122"/>
                 <a:cs typeface="Arial" panose="020B0604020202020204" pitchFamily="34" charset="0"/>
                 <a:sym typeface="+mn-ea"/>
               </a:rPr>
-              <a:t>It is represented by .text section. </a:t>
+              <a:t>It is represented by .text </a:t>
+            </a:r>
+            <a:r>
+              <a:rPr lang="en-US" altLang="zh-CN" sz="2800" b="0" dirty="0">
+                <a:solidFill>
+                  <a:prstClr val="black"/>
+                </a:solidFill>
+                <a:latin typeface="Arial" panose="020B0604020202020204" pitchFamily="34" charset="0"/>
+                <a:ea typeface="Microsoft YaHei Light" charset="-122"/>
+                <a:cs typeface="Arial" panose="020B0604020202020204" pitchFamily="34" charset="0"/>
+                <a:sym typeface="+mn-ea"/>
+              </a:rPr>
+              <a:t>segment. </a:t>
             </a:r>
             <a:endParaRPr lang="en-US" altLang="zh-CN" sz="2800" b="0" dirty="0">
               <a:solidFill>
                 <a:prstClr val="black"/>
               </a:solidFill>
               <a:latin typeface="Arial" panose="020B0604020202020204" pitchFamily="34" charset="0"/>
-              <a:ea typeface="Microsoft YaHei Light" panose="020B0502040204020203" charset="-122"/>
+              <a:ea typeface="Microsoft YaHei Light" charset="-122"/>
               <a:cs typeface="Arial" panose="020B0604020202020204" pitchFamily="34" charset="0"/>
               <a:sym typeface="+mn-ea"/>
             </a:endParaRPr>
@@ -14259,7 +14252,7 @@
                   <a:prstClr val="black"/>
                 </a:solidFill>
                 <a:latin typeface="Arial" panose="020B0604020202020204" pitchFamily="34" charset="0"/>
-                <a:ea typeface="Microsoft YaHei Light" panose="020B0502040204020203" charset="-122"/>
+                <a:ea typeface="Microsoft YaHei Light" charset="-122"/>
                 <a:cs typeface="Arial" panose="020B0604020202020204" pitchFamily="34" charset="0"/>
                 <a:sym typeface="+mn-ea"/>
               </a:rPr>
@@ -14270,7 +14263,7 @@
                 <a:prstClr val="black"/>
               </a:solidFill>
               <a:latin typeface="Arial" panose="020B0604020202020204" pitchFamily="34" charset="0"/>
-              <a:ea typeface="Microsoft YaHei Light" panose="020B0502040204020203" charset="-122"/>
+              <a:ea typeface="Microsoft YaHei Light" charset="-122"/>
               <a:cs typeface="Arial" panose="020B0604020202020204" pitchFamily="34" charset="0"/>
               <a:sym typeface="+mn-ea"/>
             </a:endParaRPr>
@@ -14301,7 +14294,7 @@
                   <a:prstClr val="black"/>
                 </a:solidFill>
                 <a:latin typeface="Arial" panose="020B0604020202020204" pitchFamily="34" charset="0"/>
-                <a:ea typeface="Microsoft YaHei Light" panose="020B0502040204020203" charset="-122"/>
+                <a:ea typeface="Microsoft YaHei Light" charset="-122"/>
                 <a:cs typeface="Arial" panose="020B0604020202020204" pitchFamily="34" charset="0"/>
                 <a:sym typeface="+mn-ea"/>
               </a:rPr>
@@ -14312,7 +14305,7 @@
                 <a:prstClr val="black"/>
               </a:solidFill>
               <a:latin typeface="Arial" panose="020B0604020202020204" pitchFamily="34" charset="0"/>
-              <a:ea typeface="Microsoft YaHei Light" panose="020B0502040204020203" charset="-122"/>
+              <a:ea typeface="Microsoft YaHei Light" charset="-122"/>
               <a:cs typeface="Arial" panose="020B0604020202020204" pitchFamily="34" charset="0"/>
               <a:sym typeface="+mn-ea"/>
             </a:endParaRPr>
@@ -14777,7 +14770,7 @@
                   <a:prstClr val="black"/>
                 </a:solidFill>
                 <a:latin typeface="Arial" panose="020B0604020202020204" pitchFamily="34" charset="0"/>
-                <a:ea typeface="Microsoft YaHei Light" panose="020B0502040204020203" charset="-122"/>
+                <a:ea typeface="Microsoft YaHei Light" charset="-122"/>
                 <a:cs typeface="Arial" panose="020B0604020202020204" pitchFamily="34" charset="0"/>
                 <a:sym typeface="+mn-ea"/>
               </a:rPr>
@@ -14788,7 +14781,7 @@
                 <a:prstClr val="black"/>
               </a:solidFill>
               <a:latin typeface="Arial" panose="020B0604020202020204" pitchFamily="34" charset="0"/>
-              <a:ea typeface="Microsoft YaHei Light" panose="020B0502040204020203" charset="-122"/>
+              <a:ea typeface="Microsoft YaHei Light" charset="-122"/>
               <a:cs typeface="Arial" panose="020B0604020202020204" pitchFamily="34" charset="0"/>
               <a:sym typeface="+mn-ea"/>
             </a:endParaRPr>
@@ -15253,7 +15246,7 @@
                   <a:prstClr val="black"/>
                 </a:solidFill>
                 <a:latin typeface="Arial" panose="020B0604020202020204" pitchFamily="34" charset="0"/>
-                <a:ea typeface="Microsoft YaHei Light" panose="020B0502040204020203" charset="-122"/>
+                <a:ea typeface="Microsoft YaHei Light" charset="-122"/>
                 <a:cs typeface="Arial" panose="020B0604020202020204" pitchFamily="34" charset="0"/>
                 <a:sym typeface="+mn-ea"/>
               </a:rPr>
@@ -15264,7 +15257,7 @@
                 <a:prstClr val="black"/>
               </a:solidFill>
               <a:latin typeface="Arial" panose="020B0604020202020204" pitchFamily="34" charset="0"/>
-              <a:ea typeface="Microsoft YaHei Light" panose="020B0502040204020203" charset="-122"/>
+              <a:ea typeface="Microsoft YaHei Light" charset="-122"/>
               <a:cs typeface="Arial" panose="020B0604020202020204" pitchFamily="34" charset="0"/>
               <a:sym typeface="+mn-ea"/>
             </a:endParaRPr>
@@ -15287,7 +15280,7 @@
                   <a:prstClr val="black"/>
                 </a:solidFill>
                 <a:latin typeface="Arial" panose="020B0604020202020204" pitchFamily="34" charset="0"/>
-                <a:ea typeface="Microsoft YaHei Light" panose="020B0502040204020203" charset="-122"/>
+                <a:ea typeface="Microsoft YaHei Light" charset="-122"/>
                 <a:cs typeface="Arial" panose="020B0604020202020204" pitchFamily="34" charset="0"/>
                 <a:sym typeface="+mn-ea"/>
               </a:rPr>
@@ -15299,7 +15292,7 @@
                   <a:prstClr val="black"/>
                 </a:solidFill>
                 <a:latin typeface="Arial" panose="020B0604020202020204" pitchFamily="34" charset="0"/>
-                <a:ea typeface="Microsoft YaHei Light" panose="020B0502040204020203" charset="-122"/>
+                <a:ea typeface="Microsoft YaHei Light" charset="-122"/>
                 <a:cs typeface="Arial" panose="020B0604020202020204" pitchFamily="34" charset="0"/>
                 <a:sym typeface="+mn-ea"/>
               </a:rPr>
@@ -15310,7 +15303,7 @@
                 <a:prstClr val="black"/>
               </a:solidFill>
               <a:latin typeface="Arial" panose="020B0604020202020204" pitchFamily="34" charset="0"/>
-              <a:ea typeface="Microsoft YaHei Light" panose="020B0502040204020203" charset="-122"/>
+              <a:ea typeface="Microsoft YaHei Light" charset="-122"/>
               <a:cs typeface="Arial" panose="020B0604020202020204" pitchFamily="34" charset="0"/>
               <a:sym typeface="+mn-ea"/>
             </a:endParaRPr>
@@ -15341,7 +15334,7 @@
                   <a:prstClr val="black"/>
                 </a:solidFill>
                 <a:latin typeface="Arial" panose="020B0604020202020204" pitchFamily="34" charset="0"/>
-                <a:ea typeface="Microsoft YaHei Light" panose="020B0502040204020203" charset="-122"/>
+                <a:ea typeface="Microsoft YaHei Light" charset="-122"/>
                 <a:cs typeface="Arial" panose="020B0604020202020204" pitchFamily="34" charset="0"/>
                 <a:sym typeface="+mn-ea"/>
               </a:rPr>
@@ -15352,7 +15345,7 @@
                 <a:prstClr val="black"/>
               </a:solidFill>
               <a:latin typeface="Arial" panose="020B0604020202020204" pitchFamily="34" charset="0"/>
-              <a:ea typeface="Microsoft YaHei Light" panose="020B0502040204020203" charset="-122"/>
+              <a:ea typeface="Microsoft YaHei Light" charset="-122"/>
               <a:cs typeface="Arial" panose="020B0604020202020204" pitchFamily="34" charset="0"/>
               <a:sym typeface="+mn-ea"/>
             </a:endParaRPr>
@@ -15375,7 +15368,7 @@
                   <a:prstClr val="black"/>
                 </a:solidFill>
                 <a:latin typeface="Arial" panose="020B0604020202020204" pitchFamily="34" charset="0"/>
-                <a:ea typeface="Microsoft YaHei Light" panose="020B0502040204020203" charset="-122"/>
+                <a:ea typeface="Microsoft YaHei Light" charset="-122"/>
                 <a:cs typeface="Arial" panose="020B0604020202020204" pitchFamily="34" charset="0"/>
                 <a:sym typeface="+mn-ea"/>
               </a:rPr>
@@ -15386,7 +15379,7 @@
                 <a:prstClr val="black"/>
               </a:solidFill>
               <a:latin typeface="Arial" panose="020B0604020202020204" pitchFamily="34" charset="0"/>
-              <a:ea typeface="Microsoft YaHei Light" panose="020B0502040204020203" charset="-122"/>
+              <a:ea typeface="Microsoft YaHei Light" charset="-122"/>
               <a:cs typeface="Arial" panose="020B0604020202020204" pitchFamily="34" charset="0"/>
               <a:sym typeface="+mn-ea"/>
             </a:endParaRPr>
@@ -15409,7 +15402,7 @@
                   <a:prstClr val="black"/>
                 </a:solidFill>
                 <a:latin typeface="Arial" panose="020B0604020202020204" pitchFamily="34" charset="0"/>
-                <a:ea typeface="Microsoft YaHei Light" panose="020B0502040204020203" charset="-122"/>
+                <a:ea typeface="Microsoft YaHei Light" charset="-122"/>
                 <a:cs typeface="Arial" panose="020B0604020202020204" pitchFamily="34" charset="0"/>
                 <a:sym typeface="+mn-ea"/>
               </a:rPr>
@@ -15420,7 +15413,7 @@
                 <a:prstClr val="black"/>
               </a:solidFill>
               <a:latin typeface="Arial" panose="020B0604020202020204" pitchFamily="34" charset="0"/>
-              <a:ea typeface="Microsoft YaHei Light" panose="020B0502040204020203" charset="-122"/>
+              <a:ea typeface="Microsoft YaHei Light" charset="-122"/>
               <a:cs typeface="Arial" panose="020B0604020202020204" pitchFamily="34" charset="0"/>
               <a:sym typeface="+mn-ea"/>
             </a:endParaRPr>
@@ -16855,7 +16848,7 @@
               <a:uLnTx/>
               <a:uFillTx/>
               <a:latin typeface="Segoe UI" panose="020B0502040204020203"/>
-              <a:ea typeface="Microsoft YaHei Light" panose="020B0502040204020203" charset="-122"/>
+              <a:ea typeface="Microsoft YaHei Light" charset="-122"/>
               <a:cs typeface="+mn-cs"/>
             </a:endParaRPr>
           </a:p>
@@ -16899,7 +16892,7 @@
                   </a:srgbClr>
                 </a:solidFill>
                 <a:latin typeface="Arial Black" panose="020B0A04020102020204" charset="0"/>
-                <a:ea typeface="Microsoft YaHei Light" panose="020B0502040204020203" charset="-122"/>
+                <a:ea typeface="Microsoft YaHei Light" charset="-122"/>
                 <a:cs typeface="Arial Black" panose="020B0A04020102020204" charset="0"/>
                 <a:sym typeface="+mn-lt"/>
               </a:rPr>
@@ -16912,7 +16905,7 @@
                 </a:srgbClr>
               </a:solidFill>
               <a:latin typeface="Arial Black" panose="020B0A04020102020204" charset="0"/>
-              <a:ea typeface="Microsoft YaHei Light" panose="020B0502040204020203" charset="-122"/>
+              <a:ea typeface="Microsoft YaHei Light" charset="-122"/>
               <a:cs typeface="Arial Black" panose="020B0A04020102020204" charset="0"/>
               <a:sym typeface="+mn-lt"/>
             </a:endParaRPr>
@@ -17041,7 +17034,7 @@
                   <a:prstClr val="black"/>
                 </a:solidFill>
                 <a:latin typeface="Segoe UI" panose="020B0502040204020203"/>
-                <a:ea typeface="Microsoft YaHei Light" panose="020B0502040204020203" charset="-122"/>
+                <a:ea typeface="Microsoft YaHei Light" charset="-122"/>
               </a:rPr>
             </a:fld>
             <a:endParaRPr lang="zh-CN" altLang="en-US">
@@ -17049,7 +17042,7 @@
                 <a:prstClr val="black"/>
               </a:solidFill>
               <a:latin typeface="Segoe UI" panose="020B0502040204020203"/>
-              <a:ea typeface="Microsoft YaHei Light" panose="020B0502040204020203" charset="-122"/>
+              <a:ea typeface="Microsoft YaHei Light" charset="-122"/>
             </a:endParaRPr>
           </a:p>
         </p:txBody>
@@ -17115,7 +17108,7 @@
               <a:uLnTx/>
               <a:uFillTx/>
               <a:latin typeface="Segoe UI" panose="020B0502040204020203"/>
-              <a:ea typeface="Microsoft YaHei Light" panose="020B0502040204020203" charset="-122"/>
+              <a:ea typeface="Microsoft YaHei Light" charset="-122"/>
               <a:cs typeface="+mn-cs"/>
             </a:endParaRPr>
           </a:p>
@@ -17160,7 +17153,7 @@
                   <a:prstClr val="white"/>
                 </a:solidFill>
                 <a:latin typeface="Segoe UI" panose="020B0502040204020203"/>
-                <a:ea typeface="Microsoft YaHei Light" panose="020B0502040204020203" charset="-122"/>
+                <a:ea typeface="Microsoft YaHei Light" charset="-122"/>
               </a:rPr>
               <a:t>02</a:t>
             </a:r>
@@ -17169,7 +17162,7 @@
                 <a:prstClr val="white"/>
               </a:solidFill>
               <a:latin typeface="Segoe UI" panose="020B0502040204020203"/>
-              <a:ea typeface="Microsoft YaHei Light" panose="020B0502040204020203" charset="-122"/>
+              <a:ea typeface="Microsoft YaHei Light" charset="-122"/>
             </a:endParaRPr>
           </a:p>
         </p:txBody>
@@ -17213,7 +17206,7 @@
                   <a:prstClr val="white"/>
                 </a:solidFill>
                 <a:latin typeface="Segoe UI" panose="020B0502040204020203"/>
-                <a:ea typeface="Microsoft YaHei Light" panose="020B0502040204020203" charset="-122"/>
+                <a:ea typeface="Microsoft YaHei Light" charset="-122"/>
               </a:rPr>
               <a:t>Part Two</a:t>
             </a:r>
@@ -17222,7 +17215,7 @@
                 <a:prstClr val="white"/>
               </a:solidFill>
               <a:latin typeface="Segoe UI" panose="020B0502040204020203"/>
-              <a:ea typeface="Microsoft YaHei Light" panose="020B0502040204020203" charset="-122"/>
+              <a:ea typeface="Microsoft YaHei Light" charset="-122"/>
             </a:endParaRPr>
           </a:p>
         </p:txBody>
@@ -17303,7 +17296,7 @@
                 <a:uLnTx/>
                 <a:uFillTx/>
                 <a:latin typeface="Segoe UI" panose="020B0502040204020203"/>
-                <a:ea typeface="Microsoft YaHei Light" panose="020B0502040204020203" charset="-122"/>
+                <a:ea typeface="Microsoft YaHei Light" charset="-122"/>
                 <a:cs typeface="+mn-cs"/>
               </a:endParaRPr>
             </a:p>
@@ -17371,7 +17364,7 @@
                 <a:uLnTx/>
                 <a:uFillTx/>
                 <a:latin typeface="Segoe UI" panose="020B0502040204020203"/>
-                <a:ea typeface="Microsoft YaHei Light" panose="020B0502040204020203" charset="-122"/>
+                <a:ea typeface="Microsoft YaHei Light" charset="-122"/>
                 <a:cs typeface="+mn-cs"/>
               </a:endParaRPr>
             </a:p>
@@ -17439,7 +17432,7 @@
                 <a:uLnTx/>
                 <a:uFillTx/>
                 <a:latin typeface="Segoe UI" panose="020B0502040204020203"/>
-                <a:ea typeface="Microsoft YaHei Light" panose="020B0502040204020203" charset="-122"/>
+                <a:ea typeface="Microsoft YaHei Light" charset="-122"/>
                 <a:cs typeface="+mn-cs"/>
               </a:endParaRPr>
             </a:p>
@@ -17506,7 +17499,7 @@
                 <a:uLnTx/>
                 <a:uFillTx/>
                 <a:latin typeface="Segoe UI" panose="020B0502040204020203"/>
-                <a:ea typeface="Microsoft YaHei Light" panose="020B0502040204020203" charset="-122"/>
+                <a:ea typeface="Microsoft YaHei Light" charset="-122"/>
                 <a:cs typeface="+mn-cs"/>
               </a:endParaRPr>
             </a:p>
@@ -17582,7 +17575,7 @@
               <a:uLnTx/>
               <a:uFillTx/>
               <a:latin typeface="Segoe UI" panose="020B0502040204020203"/>
-              <a:ea typeface="Microsoft YaHei Light" panose="020B0502040204020203" charset="-122"/>
+              <a:ea typeface="Microsoft YaHei Light" charset="-122"/>
               <a:cs typeface="+mn-cs"/>
             </a:endParaRPr>
           </a:p>
@@ -17657,7 +17650,7 @@
               <a:uLnTx/>
               <a:uFillTx/>
               <a:latin typeface="Segoe UI" panose="020B0502040204020203"/>
-              <a:ea typeface="Microsoft YaHei Light" panose="020B0502040204020203" charset="-122"/>
+              <a:ea typeface="Microsoft YaHei Light" charset="-122"/>
               <a:cs typeface="+mn-cs"/>
             </a:endParaRPr>
           </a:p>
@@ -18463,7 +18456,7 @@
                   <a:prstClr val="black"/>
                 </a:solidFill>
                 <a:latin typeface="Arial" panose="020B0604020202020204" pitchFamily="34" charset="0"/>
-                <a:ea typeface="Microsoft YaHei Light" panose="020B0502040204020203" charset="-122"/>
+                <a:ea typeface="Microsoft YaHei Light" charset="-122"/>
                 <a:cs typeface="Arial" panose="020B0604020202020204" pitchFamily="34" charset="0"/>
                 <a:sym typeface="+mn-ea"/>
               </a:rPr>
@@ -18475,7 +18468,7 @@
                   <a:prstClr val="black"/>
                 </a:solidFill>
                 <a:latin typeface="Arial" panose="020B0604020202020204" pitchFamily="34" charset="0"/>
-                <a:ea typeface="Microsoft YaHei Light" panose="020B0502040204020203" charset="-122"/>
+                <a:ea typeface="Microsoft YaHei Light" charset="-122"/>
                 <a:cs typeface="Arial" panose="020B0604020202020204" pitchFamily="34" charset="0"/>
                 <a:sym typeface="+mn-ea"/>
               </a:rPr>
@@ -18486,7 +18479,7 @@
                 <a:prstClr val="black"/>
               </a:solidFill>
               <a:latin typeface="Arial" panose="020B0604020202020204" pitchFamily="34" charset="0"/>
-              <a:ea typeface="Microsoft YaHei Light" panose="020B0502040204020203" charset="-122"/>
+              <a:ea typeface="Microsoft YaHei Light" charset="-122"/>
               <a:cs typeface="Arial" panose="020B0604020202020204" pitchFamily="34" charset="0"/>
               <a:sym typeface="+mn-ea"/>
             </a:endParaRPr>
@@ -18509,7 +18502,7 @@
                   <a:prstClr val="black"/>
                 </a:solidFill>
                 <a:latin typeface="Arial" panose="020B0604020202020204" pitchFamily="34" charset="0"/>
-                <a:ea typeface="Microsoft YaHei Light" panose="020B0502040204020203" charset="-122"/>
+                <a:ea typeface="Microsoft YaHei Light" charset="-122"/>
                 <a:cs typeface="Arial" panose="020B0604020202020204" pitchFamily="34" charset="0"/>
                 <a:sym typeface="+mn-ea"/>
               </a:rPr>
@@ -18521,7 +18514,7 @@
                   <a:prstClr val="black"/>
                 </a:solidFill>
                 <a:latin typeface="Arial" panose="020B0604020202020204" pitchFamily="34" charset="0"/>
-                <a:ea typeface="Microsoft YaHei Light" panose="020B0502040204020203" charset="-122"/>
+                <a:ea typeface="Microsoft YaHei Light" charset="-122"/>
                 <a:cs typeface="Arial" panose="020B0604020202020204" pitchFamily="34" charset="0"/>
                 <a:sym typeface="+mn-ea"/>
               </a:rPr>
@@ -18532,7 +18525,7 @@
                 <a:prstClr val="black"/>
               </a:solidFill>
               <a:latin typeface="Arial" panose="020B0604020202020204" pitchFamily="34" charset="0"/>
-              <a:ea typeface="Microsoft YaHei Light" panose="020B0502040204020203" charset="-122"/>
+              <a:ea typeface="Microsoft YaHei Light" charset="-122"/>
               <a:cs typeface="Arial" panose="020B0604020202020204" pitchFamily="34" charset="0"/>
               <a:sym typeface="+mn-ea"/>
             </a:endParaRPr>
@@ -18555,7 +18548,7 @@
                   <a:prstClr val="black"/>
                 </a:solidFill>
                 <a:latin typeface="Arial" panose="020B0604020202020204" pitchFamily="34" charset="0"/>
-                <a:ea typeface="Microsoft YaHei Light" panose="020B0502040204020203" charset="-122"/>
+                <a:ea typeface="Microsoft YaHei Light" charset="-122"/>
                 <a:cs typeface="Arial" panose="020B0604020202020204" pitchFamily="34" charset="0"/>
                 <a:sym typeface="+mn-ea"/>
               </a:rPr>
@@ -18567,7 +18560,7 @@
                   <a:prstClr val="black"/>
                 </a:solidFill>
                 <a:latin typeface="Arial" panose="020B0604020202020204" pitchFamily="34" charset="0"/>
-                <a:ea typeface="Microsoft YaHei Light" panose="020B0502040204020203" charset="-122"/>
+                <a:ea typeface="Microsoft YaHei Light" charset="-122"/>
                 <a:cs typeface="Arial" panose="020B0604020202020204" pitchFamily="34" charset="0"/>
                 <a:sym typeface="+mn-ea"/>
               </a:rPr>
@@ -18578,7 +18571,7 @@
                 <a:prstClr val="black"/>
               </a:solidFill>
               <a:latin typeface="Arial" panose="020B0604020202020204" pitchFamily="34" charset="0"/>
-              <a:ea typeface="Microsoft YaHei Light" panose="020B0502040204020203" charset="-122"/>
+              <a:ea typeface="Microsoft YaHei Light" charset="-122"/>
               <a:cs typeface="Arial" panose="020B0604020202020204" pitchFamily="34" charset="0"/>
               <a:sym typeface="+mn-ea"/>
             </a:endParaRPr>
@@ -18601,7 +18594,7 @@
                   <a:prstClr val="black"/>
                 </a:solidFill>
                 <a:latin typeface="Arial" panose="020B0604020202020204" pitchFamily="34" charset="0"/>
-                <a:ea typeface="Microsoft YaHei Light" panose="020B0502040204020203" charset="-122"/>
+                <a:ea typeface="Microsoft YaHei Light" charset="-122"/>
                 <a:cs typeface="Arial" panose="020B0604020202020204" pitchFamily="34" charset="0"/>
                 <a:sym typeface="+mn-ea"/>
               </a:rPr>
@@ -18613,7 +18606,7 @@
                   <a:prstClr val="black"/>
                 </a:solidFill>
                 <a:latin typeface="Arial" panose="020B0604020202020204" pitchFamily="34" charset="0"/>
-                <a:ea typeface="Microsoft YaHei Light" panose="020B0502040204020203" charset="-122"/>
+                <a:ea typeface="Microsoft YaHei Light" charset="-122"/>
                 <a:cs typeface="Arial" panose="020B0604020202020204" pitchFamily="34" charset="0"/>
                 <a:sym typeface="+mn-ea"/>
               </a:rPr>
@@ -18624,7 +18617,7 @@
                 <a:prstClr val="black"/>
               </a:solidFill>
               <a:latin typeface="Arial" panose="020B0604020202020204" pitchFamily="34" charset="0"/>
-              <a:ea typeface="Microsoft YaHei Light" panose="020B0502040204020203" charset="-122"/>
+              <a:ea typeface="Microsoft YaHei Light" charset="-122"/>
               <a:cs typeface="Arial" panose="020B0604020202020204" pitchFamily="34" charset="0"/>
               <a:sym typeface="+mn-ea"/>
             </a:endParaRPr>
@@ -18963,7 +18956,7 @@
                 <a:uLnTx/>
                 <a:uFillTx/>
                 <a:latin typeface="Segoe UI" panose="020B0502040204020203"/>
-                <a:ea typeface="Microsoft YaHei Light" panose="020B0502040204020203" charset="-122"/>
+                <a:ea typeface="Microsoft YaHei Light" charset="-122"/>
                 <a:cs typeface="+mn-cs"/>
               </a:endParaRPr>
             </a:p>
@@ -19028,7 +19021,7 @@
                 <a:uLnTx/>
                 <a:uFillTx/>
                 <a:latin typeface="Segoe UI" panose="020B0502040204020203"/>
-                <a:ea typeface="Microsoft YaHei Light" panose="020B0502040204020203" charset="-122"/>
+                <a:ea typeface="Microsoft YaHei Light" charset="-122"/>
                 <a:cs typeface="+mn-cs"/>
               </a:endParaRPr>
             </a:p>
@@ -19100,7 +19093,7 @@
                 <a:uLnTx/>
                 <a:uFillTx/>
                 <a:latin typeface="Segoe UI" panose="020B0502040204020203"/>
-                <a:ea typeface="Microsoft YaHei Light" panose="020B0502040204020203" charset="-122"/>
+                <a:ea typeface="Microsoft YaHei Light" charset="-122"/>
                 <a:cs typeface="+mn-cs"/>
               </a:endParaRPr>
             </a:p>
@@ -19330,7 +19323,7 @@
                   <a:uLnTx/>
                   <a:uFillTx/>
                   <a:latin typeface="Arial Black" panose="020B0A04020102020204" charset="0"/>
-                  <a:ea typeface="Microsoft YaHei Light" panose="020B0502040204020203" charset="-122"/>
+                  <a:ea typeface="Microsoft YaHei Light" charset="-122"/>
                   <a:cs typeface="Arial Black" panose="020B0A04020102020204" charset="0"/>
                 </a:rPr>
                 <a:t>Basic Syntax</a:t>
@@ -19346,7 +19339,7 @@
                 <a:uLnTx/>
                 <a:uFillTx/>
                 <a:latin typeface="Arial Black" panose="020B0A04020102020204" charset="0"/>
-                <a:ea typeface="Microsoft YaHei Light" panose="020B0502040204020203" charset="-122"/>
+                <a:ea typeface="Microsoft YaHei Light" charset="-122"/>
                 <a:cs typeface="Arial Black" panose="020B0A04020102020204" charset="0"/>
               </a:endParaRPr>
             </a:p>
@@ -19428,7 +19421,7 @@
                 <a:uLnTx/>
                 <a:uFillTx/>
                 <a:latin typeface="Segoe UI" panose="020B0502040204020203"/>
-                <a:ea typeface="Microsoft YaHei Light" panose="020B0502040204020203" charset="-122"/>
+                <a:ea typeface="Microsoft YaHei Light" charset="-122"/>
                 <a:cs typeface="+mn-cs"/>
               </a:endParaRPr>
             </a:p>
@@ -19493,7 +19486,7 @@
                 <a:uLnTx/>
                 <a:uFillTx/>
                 <a:latin typeface="Segoe UI" panose="020B0502040204020203"/>
-                <a:ea typeface="Microsoft YaHei Light" panose="020B0502040204020203" charset="-122"/>
+                <a:ea typeface="Microsoft YaHei Light" charset="-122"/>
                 <a:cs typeface="+mn-cs"/>
               </a:endParaRPr>
             </a:p>
@@ -19565,7 +19558,7 @@
                 <a:uLnTx/>
                 <a:uFillTx/>
                 <a:latin typeface="Segoe UI" panose="020B0502040204020203"/>
-                <a:ea typeface="Microsoft YaHei Light" panose="020B0502040204020203" charset="-122"/>
+                <a:ea typeface="Microsoft YaHei Light" charset="-122"/>
                 <a:cs typeface="+mn-cs"/>
               </a:endParaRPr>
             </a:p>
@@ -19795,7 +19788,7 @@
                   <a:uLnTx/>
                   <a:uFillTx/>
                   <a:latin typeface="Arial Black" panose="020B0A04020102020204" charset="0"/>
-                  <a:ea typeface="Microsoft YaHei Light" panose="020B0502040204020203" charset="-122"/>
+                  <a:ea typeface="Microsoft YaHei Light" charset="-122"/>
                   <a:cs typeface="Arial Black" panose="020B0A04020102020204" charset="0"/>
                 </a:rPr>
                 <a:t>Type of Memory</a:t>
@@ -19811,7 +19804,7 @@
                 <a:uLnTx/>
                 <a:uFillTx/>
                 <a:latin typeface="Arial Black" panose="020B0A04020102020204" charset="0"/>
-                <a:ea typeface="Microsoft YaHei Light" panose="020B0502040204020203" charset="-122"/>
+                <a:ea typeface="Microsoft YaHei Light" charset="-122"/>
                 <a:cs typeface="Arial Black" panose="020B0A04020102020204" charset="0"/>
               </a:endParaRPr>
             </a:p>
@@ -19893,7 +19886,7 @@
                 <a:uLnTx/>
                 <a:uFillTx/>
                 <a:latin typeface="Segoe UI" panose="020B0502040204020203"/>
-                <a:ea typeface="Microsoft YaHei Light" panose="020B0502040204020203" charset="-122"/>
+                <a:ea typeface="Microsoft YaHei Light" charset="-122"/>
                 <a:cs typeface="+mn-cs"/>
               </a:endParaRPr>
             </a:p>
@@ -19958,7 +19951,7 @@
                 <a:uLnTx/>
                 <a:uFillTx/>
                 <a:latin typeface="Segoe UI" panose="020B0502040204020203"/>
-                <a:ea typeface="Microsoft YaHei Light" panose="020B0502040204020203" charset="-122"/>
+                <a:ea typeface="Microsoft YaHei Light" charset="-122"/>
                 <a:cs typeface="+mn-cs"/>
               </a:endParaRPr>
             </a:p>
@@ -20030,7 +20023,7 @@
                 <a:uLnTx/>
                 <a:uFillTx/>
                 <a:latin typeface="Segoe UI" panose="020B0502040204020203"/>
-                <a:ea typeface="Microsoft YaHei Light" panose="020B0502040204020203" charset="-122"/>
+                <a:ea typeface="Microsoft YaHei Light" charset="-122"/>
                 <a:cs typeface="+mn-cs"/>
               </a:endParaRPr>
             </a:p>
@@ -20248,7 +20241,7 @@
                     </a:srgbClr>
                   </a:solidFill>
                   <a:latin typeface="Arial Black" panose="020B0A04020102020204" charset="0"/>
-                  <a:ea typeface="Microsoft YaHei Light" panose="020B0502040204020203" charset="-122"/>
+                  <a:ea typeface="Microsoft YaHei Light" charset="-122"/>
                   <a:cs typeface="Arial Black" panose="020B0A04020102020204" charset="0"/>
                   <a:sym typeface="+mn-lt"/>
                 </a:rPr>
@@ -20265,7 +20258,7 @@
                 <a:uLnTx/>
                 <a:uFillTx/>
                 <a:latin typeface="Arial Black" panose="020B0A04020102020204" charset="0"/>
-                <a:ea typeface="Microsoft YaHei Light" panose="020B0502040204020203" charset="-122"/>
+                <a:ea typeface="Microsoft YaHei Light" charset="-122"/>
                 <a:cs typeface="Arial Black" panose="020B0A04020102020204" charset="0"/>
               </a:endParaRPr>
             </a:p>
@@ -20347,7 +20340,7 @@
                 <a:uLnTx/>
                 <a:uFillTx/>
                 <a:latin typeface="Segoe UI" panose="020B0502040204020203"/>
-                <a:ea typeface="Microsoft YaHei Light" panose="020B0502040204020203" charset="-122"/>
+                <a:ea typeface="Microsoft YaHei Light" charset="-122"/>
                 <a:cs typeface="+mn-cs"/>
               </a:endParaRPr>
             </a:p>
@@ -20412,7 +20405,7 @@
                 <a:uLnTx/>
                 <a:uFillTx/>
                 <a:latin typeface="Segoe UI" panose="020B0502040204020203"/>
-                <a:ea typeface="Microsoft YaHei Light" panose="020B0502040204020203" charset="-122"/>
+                <a:ea typeface="Microsoft YaHei Light" charset="-122"/>
                 <a:cs typeface="+mn-cs"/>
               </a:endParaRPr>
             </a:p>
@@ -20484,7 +20477,7 @@
                 <a:uLnTx/>
                 <a:uFillTx/>
                 <a:latin typeface="Segoe UI" panose="020B0502040204020203"/>
-                <a:ea typeface="Microsoft YaHei Light" panose="020B0502040204020203" charset="-122"/>
+                <a:ea typeface="Microsoft YaHei Light" charset="-122"/>
                 <a:cs typeface="+mn-cs"/>
               </a:endParaRPr>
             </a:p>
@@ -20714,7 +20707,7 @@
                   <a:uLnTx/>
                   <a:uFillTx/>
                   <a:latin typeface="Arial Black" panose="020B0A04020102020204" charset="0"/>
-                  <a:ea typeface="Microsoft YaHei Light" panose="020B0502040204020203" charset="-122"/>
+                  <a:ea typeface="Microsoft YaHei Light" charset="-122"/>
                   <a:cs typeface="Arial Black" panose="020B0A04020102020204" charset="0"/>
                 </a:rPr>
                 <a:t>Addressing Modes</a:t>
@@ -20730,7 +20723,7 @@
                 <a:uLnTx/>
                 <a:uFillTx/>
                 <a:latin typeface="Arial Black" panose="020B0A04020102020204" charset="0"/>
-                <a:ea typeface="Microsoft YaHei Light" panose="020B0502040204020203" charset="-122"/>
+                <a:ea typeface="Microsoft YaHei Light" charset="-122"/>
                 <a:cs typeface="Arial Black" panose="020B0A04020102020204" charset="0"/>
               </a:endParaRPr>
             </a:p>
@@ -20812,7 +20805,7 @@
                 <a:uLnTx/>
                 <a:uFillTx/>
                 <a:latin typeface="Segoe UI" panose="020B0502040204020203"/>
-                <a:ea typeface="Microsoft YaHei Light" panose="020B0502040204020203" charset="-122"/>
+                <a:ea typeface="Microsoft YaHei Light" charset="-122"/>
                 <a:cs typeface="+mn-cs"/>
               </a:endParaRPr>
             </a:p>
@@ -20877,7 +20870,7 @@
                 <a:uLnTx/>
                 <a:uFillTx/>
                 <a:latin typeface="Segoe UI" panose="020B0502040204020203"/>
-                <a:ea typeface="Microsoft YaHei Light" panose="020B0502040204020203" charset="-122"/>
+                <a:ea typeface="Microsoft YaHei Light" charset="-122"/>
                 <a:cs typeface="+mn-cs"/>
               </a:endParaRPr>
             </a:p>
@@ -20949,7 +20942,7 @@
                 <a:uLnTx/>
                 <a:uFillTx/>
                 <a:latin typeface="Segoe UI" panose="020B0502040204020203"/>
-                <a:ea typeface="Microsoft YaHei Light" panose="020B0502040204020203" charset="-122"/>
+                <a:ea typeface="Microsoft YaHei Light" charset="-122"/>
                 <a:cs typeface="+mn-cs"/>
               </a:endParaRPr>
             </a:p>
@@ -21179,7 +21172,7 @@
                   <a:uLnTx/>
                   <a:uFillTx/>
                   <a:latin typeface="Arial Black" panose="020B0A04020102020204" charset="0"/>
-                  <a:ea typeface="Microsoft YaHei Light" panose="020B0502040204020203" charset="-122"/>
+                  <a:ea typeface="Microsoft YaHei Light" charset="-122"/>
                   <a:cs typeface="Arial Black" panose="020B0A04020102020204" charset="0"/>
                 </a:rPr>
                 <a:t>Variables</a:t>
@@ -21195,7 +21188,7 @@
                 <a:uLnTx/>
                 <a:uFillTx/>
                 <a:latin typeface="Arial Black" panose="020B0A04020102020204" charset="0"/>
-                <a:ea typeface="Microsoft YaHei Light" panose="020B0502040204020203" charset="-122"/>
+                <a:ea typeface="Microsoft YaHei Light" charset="-122"/>
                 <a:cs typeface="Arial Black" panose="020B0A04020102020204" charset="0"/>
               </a:endParaRPr>
             </a:p>
@@ -25049,7 +25042,7 @@
                 <a:prstClr val="black"/>
               </a:solidFill>
               <a:latin typeface="Arial" panose="020B0604020202020204" pitchFamily="34" charset="0"/>
-              <a:ea typeface="Microsoft YaHei Light" panose="020B0502040204020203" charset="-122"/>
+              <a:ea typeface="Microsoft YaHei Light" charset="-122"/>
               <a:cs typeface="Arial" panose="020B0604020202020204" pitchFamily="34" charset="0"/>
               <a:sym typeface="+mn-ea"/>
             </a:endParaRPr>
@@ -25258,7 +25251,7 @@
                   <a:srgbClr val="BF191A"/>
                 </a:solidFill>
                 <a:latin typeface="Arial Black" panose="020B0A04020102020204" charset="0"/>
-                <a:ea typeface="Microsoft YaHei Light" panose="020B0502040204020203" charset="-122"/>
+                <a:ea typeface="Microsoft YaHei Light" charset="-122"/>
                 <a:cs typeface="Arial Black" panose="020B0A04020102020204" charset="0"/>
                 <a:sym typeface="+mn-lt"/>
               </a:rPr>
@@ -25269,7 +25262,7 @@
                 <a:srgbClr val="BF191A"/>
               </a:solidFill>
               <a:latin typeface="Arial Black" panose="020B0A04020102020204" charset="0"/>
-              <a:ea typeface="Microsoft YaHei Light" panose="020B0502040204020203" charset="-122"/>
+              <a:ea typeface="Microsoft YaHei Light" charset="-122"/>
               <a:cs typeface="Arial Black" panose="020B0A04020102020204" charset="0"/>
               <a:sym typeface="+mn-lt"/>
             </a:endParaRPr>
@@ -25398,7 +25391,7 @@
                   <a:prstClr val="black"/>
                 </a:solidFill>
                 <a:latin typeface="Segoe UI" panose="020B0502040204020203"/>
-                <a:ea typeface="Microsoft YaHei Light" panose="020B0502040204020203" charset="-122"/>
+                <a:ea typeface="Microsoft YaHei Light" charset="-122"/>
               </a:rPr>
             </a:fld>
             <a:endParaRPr lang="zh-CN" altLang="en-US">
@@ -25406,7 +25399,7 @@
                 <a:prstClr val="black"/>
               </a:solidFill>
               <a:latin typeface="Segoe UI" panose="020B0502040204020203"/>
-              <a:ea typeface="Microsoft YaHei Light" panose="020B0502040204020203" charset="-122"/>
+              <a:ea typeface="Microsoft YaHei Light" charset="-122"/>
             </a:endParaRPr>
           </a:p>
         </p:txBody>
@@ -25472,7 +25465,7 @@
               <a:uLnTx/>
               <a:uFillTx/>
               <a:latin typeface="Segoe UI" panose="020B0502040204020203"/>
-              <a:ea typeface="Microsoft YaHei Light" panose="020B0502040204020203" charset="-122"/>
+              <a:ea typeface="Microsoft YaHei Light" charset="-122"/>
               <a:cs typeface="+mn-cs"/>
             </a:endParaRPr>
           </a:p>
@@ -25517,7 +25510,7 @@
                   <a:prstClr val="white"/>
                 </a:solidFill>
                 <a:latin typeface="Segoe UI" panose="020B0502040204020203"/>
-                <a:ea typeface="Microsoft YaHei Light" panose="020B0502040204020203" charset="-122"/>
+                <a:ea typeface="Microsoft YaHei Light" charset="-122"/>
               </a:rPr>
               <a:t>01</a:t>
             </a:r>
@@ -25526,7 +25519,7 @@
                 <a:prstClr val="white"/>
               </a:solidFill>
               <a:latin typeface="Segoe UI" panose="020B0502040204020203"/>
-              <a:ea typeface="Microsoft YaHei Light" panose="020B0502040204020203" charset="-122"/>
+              <a:ea typeface="Microsoft YaHei Light" charset="-122"/>
             </a:endParaRPr>
           </a:p>
         </p:txBody>
@@ -25570,7 +25563,7 @@
                   <a:prstClr val="white"/>
                 </a:solidFill>
                 <a:latin typeface="Segoe UI" panose="020B0502040204020203"/>
-                <a:ea typeface="Microsoft YaHei Light" panose="020B0502040204020203" charset="-122"/>
+                <a:ea typeface="Microsoft YaHei Light" charset="-122"/>
               </a:rPr>
               <a:t>Part One</a:t>
             </a:r>
@@ -25579,7 +25572,7 @@
                 <a:prstClr val="white"/>
               </a:solidFill>
               <a:latin typeface="Segoe UI" panose="020B0502040204020203"/>
-              <a:ea typeface="Microsoft YaHei Light" panose="020B0502040204020203" charset="-122"/>
+              <a:ea typeface="Microsoft YaHei Light" charset="-122"/>
             </a:endParaRPr>
           </a:p>
         </p:txBody>
@@ -25660,7 +25653,7 @@
                 <a:uLnTx/>
                 <a:uFillTx/>
                 <a:latin typeface="Segoe UI" panose="020B0502040204020203"/>
-                <a:ea typeface="Microsoft YaHei Light" panose="020B0502040204020203" charset="-122"/>
+                <a:ea typeface="Microsoft YaHei Light" charset="-122"/>
                 <a:cs typeface="+mn-cs"/>
               </a:endParaRPr>
             </a:p>
@@ -25728,7 +25721,7 @@
                 <a:uLnTx/>
                 <a:uFillTx/>
                 <a:latin typeface="Segoe UI" panose="020B0502040204020203"/>
-                <a:ea typeface="Microsoft YaHei Light" panose="020B0502040204020203" charset="-122"/>
+                <a:ea typeface="Microsoft YaHei Light" charset="-122"/>
                 <a:cs typeface="+mn-cs"/>
               </a:endParaRPr>
             </a:p>
@@ -25796,7 +25789,7 @@
                 <a:uLnTx/>
                 <a:uFillTx/>
                 <a:latin typeface="Segoe UI" panose="020B0502040204020203"/>
-                <a:ea typeface="Microsoft YaHei Light" panose="020B0502040204020203" charset="-122"/>
+                <a:ea typeface="Microsoft YaHei Light" charset="-122"/>
                 <a:cs typeface="+mn-cs"/>
               </a:endParaRPr>
             </a:p>
@@ -25861,7 +25854,7 @@
                 <a:uLnTx/>
                 <a:uFillTx/>
                 <a:latin typeface="Segoe UI" panose="020B0502040204020203"/>
-                <a:ea typeface="Microsoft YaHei Light" panose="020B0502040204020203" charset="-122"/>
+                <a:ea typeface="Microsoft YaHei Light" charset="-122"/>
                 <a:cs typeface="+mn-cs"/>
               </a:endParaRPr>
             </a:p>
@@ -25937,7 +25930,7 @@
               <a:uLnTx/>
               <a:uFillTx/>
               <a:latin typeface="Segoe UI" panose="020B0502040204020203"/>
-              <a:ea typeface="Microsoft YaHei Light" panose="020B0502040204020203" charset="-122"/>
+              <a:ea typeface="Microsoft YaHei Light" charset="-122"/>
               <a:cs typeface="+mn-cs"/>
             </a:endParaRPr>
           </a:p>
@@ -26012,7 +26005,7 @@
               <a:uLnTx/>
               <a:uFillTx/>
               <a:latin typeface="Segoe UI" panose="020B0502040204020203"/>
-              <a:ea typeface="Microsoft YaHei Light" panose="020B0502040204020203" charset="-122"/>
+              <a:ea typeface="Microsoft YaHei Light" charset="-122"/>
               <a:cs typeface="+mn-cs"/>
             </a:endParaRPr>
           </a:p>
@@ -26489,7 +26482,7 @@
                   <a:prstClr val="black"/>
                 </a:solidFill>
                 <a:latin typeface="Arial" panose="020B0604020202020204" pitchFamily="34" charset="0"/>
-                <a:ea typeface="Microsoft YaHei Light" panose="020B0502040204020203" charset="-122"/>
+                <a:ea typeface="Microsoft YaHei Light" charset="-122"/>
                 <a:cs typeface="Arial" panose="020B0604020202020204" pitchFamily="34" charset="0"/>
                 <a:sym typeface="+mn-ea"/>
               </a:rPr>
@@ -26500,7 +26493,7 @@
                 <a:prstClr val="black"/>
               </a:solidFill>
               <a:latin typeface="Arial" panose="020B0604020202020204" pitchFamily="34" charset="0"/>
-              <a:ea typeface="Microsoft YaHei Light" panose="020B0502040204020203" charset="-122"/>
+              <a:ea typeface="Microsoft YaHei Light" charset="-122"/>
               <a:cs typeface="Arial" panose="020B0604020202020204" pitchFamily="34" charset="0"/>
               <a:sym typeface="+mn-ea"/>
             </a:endParaRPr>
@@ -26526,7 +26519,7 @@
                   <a:prstClr val="black"/>
                 </a:solidFill>
                 <a:latin typeface="Arial" panose="020B0604020202020204" pitchFamily="34" charset="0"/>
-                <a:ea typeface="Microsoft YaHei Light" panose="020B0502040204020203" charset="-122"/>
+                <a:ea typeface="Microsoft YaHei Light" charset="-122"/>
                 <a:cs typeface="Arial" panose="020B0604020202020204" pitchFamily="34" charset="0"/>
                 <a:sym typeface="+mn-ea"/>
               </a:rPr>
@@ -26537,7 +26530,7 @@
                 <a:prstClr val="black"/>
               </a:solidFill>
               <a:latin typeface="Arial" panose="020B0604020202020204" pitchFamily="34" charset="0"/>
-              <a:ea typeface="Microsoft YaHei Light" panose="020B0502040204020203" charset="-122"/>
+              <a:ea typeface="Microsoft YaHei Light" charset="-122"/>
               <a:cs typeface="Arial" panose="020B0604020202020204" pitchFamily="34" charset="0"/>
               <a:sym typeface="+mn-ea"/>
             </a:endParaRPr>
@@ -27050,7 +27043,7 @@
                 <a:prstClr val="black"/>
               </a:solidFill>
               <a:latin typeface="Arial" panose="020B0604020202020204" pitchFamily="34" charset="0"/>
-              <a:ea typeface="Microsoft YaHei Light" panose="020B0502040204020203" charset="-122"/>
+              <a:ea typeface="Microsoft YaHei Light" charset="-122"/>
               <a:cs typeface="Arial" panose="020B0604020202020204" pitchFamily="34" charset="0"/>
               <a:sym typeface="+mn-ea"/>
             </a:endParaRPr>
@@ -32853,7 +32846,7 @@
                   <a:prstClr val="black"/>
                 </a:solidFill>
                 <a:latin typeface="Arial" panose="020B0604020202020204" pitchFamily="34" charset="0"/>
-                <a:ea typeface="Microsoft YaHei Light" panose="020B0502040204020203" charset="-122"/>
+                <a:ea typeface="Microsoft YaHei Light" charset="-122"/>
                 <a:cs typeface="Arial" panose="020B0604020202020204" pitchFamily="34" charset="0"/>
                 <a:sym typeface="+mn-ea"/>
               </a:rPr>
@@ -32864,7 +32857,7 @@
                 <a:prstClr val="black"/>
               </a:solidFill>
               <a:latin typeface="Arial" panose="020B0604020202020204" pitchFamily="34" charset="0"/>
-              <a:ea typeface="Microsoft YaHei Light" panose="020B0502040204020203" charset="-122"/>
+              <a:ea typeface="Microsoft YaHei Light" charset="-122"/>
               <a:cs typeface="Arial" panose="020B0604020202020204" pitchFamily="34" charset="0"/>
               <a:sym typeface="+mn-ea"/>
             </a:endParaRPr>
@@ -32895,7 +32888,7 @@
                   <a:prstClr val="black"/>
                 </a:solidFill>
                 <a:latin typeface="Arial" panose="020B0604020202020204" pitchFamily="34" charset="0"/>
-                <a:ea typeface="Microsoft YaHei Light" panose="020B0502040204020203" charset="-122"/>
+                <a:ea typeface="Microsoft YaHei Light" charset="-122"/>
                 <a:cs typeface="Arial" panose="020B0604020202020204" pitchFamily="34" charset="0"/>
                 <a:sym typeface="+mn-ea"/>
               </a:rPr>
@@ -32906,7 +32899,7 @@
                 <a:prstClr val="black"/>
               </a:solidFill>
               <a:latin typeface="Arial" panose="020B0604020202020204" pitchFamily="34" charset="0"/>
-              <a:ea typeface="Microsoft YaHei Light" panose="020B0502040204020203" charset="-122"/>
+              <a:ea typeface="Microsoft YaHei Light" charset="-122"/>
               <a:cs typeface="Arial" panose="020B0604020202020204" pitchFamily="34" charset="0"/>
               <a:sym typeface="+mn-ea"/>
             </a:endParaRPr>
@@ -32937,7 +32930,7 @@
                   <a:prstClr val="black"/>
                 </a:solidFill>
                 <a:latin typeface="Arial" panose="020B0604020202020204" pitchFamily="34" charset="0"/>
-                <a:ea typeface="Microsoft YaHei Light" panose="020B0502040204020203" charset="-122"/>
+                <a:ea typeface="Microsoft YaHei Light" charset="-122"/>
                 <a:cs typeface="Arial" panose="020B0604020202020204" pitchFamily="34" charset="0"/>
                 <a:sym typeface="+mn-ea"/>
               </a:rPr>
@@ -32948,7 +32941,7 @@
                 <a:prstClr val="black"/>
               </a:solidFill>
               <a:latin typeface="Arial" panose="020B0604020202020204" pitchFamily="34" charset="0"/>
-              <a:ea typeface="Microsoft YaHei Light" panose="020B0502040204020203" charset="-122"/>
+              <a:ea typeface="Microsoft YaHei Light" charset="-122"/>
               <a:cs typeface="Arial" panose="020B0604020202020204" pitchFamily="34" charset="0"/>
               <a:sym typeface="+mn-ea"/>
             </a:endParaRPr>
@@ -32970,7 +32963,7 @@
                 <a:prstClr val="black"/>
               </a:solidFill>
               <a:latin typeface="Arial" panose="020B0604020202020204" pitchFamily="34" charset="0"/>
-              <a:ea typeface="Microsoft YaHei Light" panose="020B0502040204020203" charset="-122"/>
+              <a:ea typeface="Microsoft YaHei Light" charset="-122"/>
               <a:cs typeface="Arial" panose="020B0604020202020204" pitchFamily="34" charset="0"/>
               <a:sym typeface="+mn-ea"/>
             </a:endParaRPr>
@@ -33435,18 +33428,18 @@
                   <a:prstClr val="black"/>
                 </a:solidFill>
                 <a:latin typeface="Arial" panose="020B0604020202020204" pitchFamily="34" charset="0"/>
-                <a:ea typeface="Microsoft YaHei Light" panose="020B0502040204020203" charset="-122"/>
+                <a:ea typeface="Microsoft YaHei Light" charset="-122"/>
                 <a:cs typeface="Arial" panose="020B0604020202020204" pitchFamily="34" charset="0"/>
                 <a:sym typeface="+mn-ea"/>
               </a:rPr>
-              <a:t>It is represented by .data section and the .bss. </a:t>
+              <a:t>It is represented by .data segment and the .bss segment. </a:t>
             </a:r>
             <a:endParaRPr lang="en-US" altLang="zh-CN" sz="2800" b="0" dirty="0">
               <a:solidFill>
                 <a:prstClr val="black"/>
               </a:solidFill>
               <a:latin typeface="Arial" panose="020B0604020202020204" pitchFamily="34" charset="0"/>
-              <a:ea typeface="Microsoft YaHei Light" panose="020B0502040204020203" charset="-122"/>
+              <a:ea typeface="Microsoft YaHei Light" charset="-122"/>
               <a:cs typeface="Arial" panose="020B0604020202020204" pitchFamily="34" charset="0"/>
               <a:sym typeface="+mn-ea"/>
             </a:endParaRPr>
@@ -33477,7 +33470,7 @@
                   <a:prstClr val="black"/>
                 </a:solidFill>
                 <a:latin typeface="Arial" panose="020B0604020202020204" pitchFamily="34" charset="0"/>
-                <a:ea typeface="Microsoft YaHei Light" panose="020B0502040204020203" charset="-122"/>
+                <a:ea typeface="Microsoft YaHei Light" charset="-122"/>
                 <a:cs typeface="Arial" panose="020B0604020202020204" pitchFamily="34" charset="0"/>
                 <a:sym typeface="+mn-ea"/>
               </a:rPr>
@@ -33488,7 +33481,7 @@
                 <a:prstClr val="black"/>
               </a:solidFill>
               <a:latin typeface="Arial" panose="020B0604020202020204" pitchFamily="34" charset="0"/>
-              <a:ea typeface="Microsoft YaHei Light" panose="020B0502040204020203" charset="-122"/>
+              <a:ea typeface="Microsoft YaHei Light" charset="-122"/>
               <a:cs typeface="Arial" panose="020B0604020202020204" pitchFamily="34" charset="0"/>
               <a:sym typeface="+mn-ea"/>
             </a:endParaRPr>
@@ -33519,7 +33512,7 @@
                   <a:prstClr val="black"/>
                 </a:solidFill>
                 <a:latin typeface="Arial" panose="020B0604020202020204" pitchFamily="34" charset="0"/>
-                <a:ea typeface="Microsoft YaHei Light" panose="020B0502040204020203" charset="-122"/>
+                <a:ea typeface="Microsoft YaHei Light" charset="-122"/>
                 <a:cs typeface="Arial" panose="020B0604020202020204" pitchFamily="34" charset="0"/>
                 <a:sym typeface="+mn-ea"/>
               </a:rPr>
@@ -33530,7 +33523,7 @@
                 <a:prstClr val="black"/>
               </a:solidFill>
               <a:latin typeface="Arial" panose="020B0604020202020204" pitchFamily="34" charset="0"/>
-              <a:ea typeface="Microsoft YaHei Light" panose="020B0502040204020203" charset="-122"/>
+              <a:ea typeface="Microsoft YaHei Light" charset="-122"/>
               <a:cs typeface="Arial" panose="020B0604020202020204" pitchFamily="34" charset="0"/>
               <a:sym typeface="+mn-ea"/>
             </a:endParaRPr>
@@ -33552,7 +33545,7 @@
                 <a:prstClr val="black"/>
               </a:solidFill>
               <a:latin typeface="Arial" panose="020B0604020202020204" pitchFamily="34" charset="0"/>
-              <a:ea typeface="Microsoft YaHei Light" panose="020B0502040204020203" charset="-122"/>
+              <a:ea typeface="Microsoft YaHei Light" charset="-122"/>
               <a:cs typeface="Arial" panose="020B0604020202020204" pitchFamily="34" charset="0"/>
               <a:sym typeface="+mn-ea"/>
             </a:endParaRPr>
